--- a/servers/fastapi/debug/test.pptx
+++ b/servers/fastapi/debug/test.pptx
@@ -3133,7 +3133,9 @@
           </a:fontRef>
         </p:style>
         <p:txBody>
-          <a:bodyPr rtlCol="0" anchor="ctr" wrap="square" lIns="0" rIns="0" tIns="0" bIns="0"/>
+          <a:bodyPr rtlCol="0" anchor="ctr" wrap="square" lIns="0" rIns="0" tIns="0" bIns="0">
+            <a:spAutoFit/>
+          </a:bodyPr>
           <a:lstStyle/>
           <a:p>
             <a:pPr algn="ctr"/>
